--- a/instructors/L3-energy-efficiency.pptx
+++ b/instructors/L3-energy-efficiency.pptx
@@ -132,7 +132,7 @@
 <file path=ppt/revisionInfo.xml><?xml version="1.0" encoding="utf-8"?>
 <p1510:revInfo xmlns:a="http://schemas.openxmlformats.org/drawingml/2006/main" xmlns:r="http://schemas.openxmlformats.org/officeDocument/2006/relationships" xmlns:p1510="http://schemas.microsoft.com/office/powerpoint/2015/10/main">
   <p1510:revLst>
-    <p1510:client id="{8D5B4FD6-AB43-5A47-AC40-41F6BC8DA1F9}" v="5" dt="2025-10-07T13:28:11.464"/>
+    <p1510:client id="{20FB413B-601D-C144-ABEF-B62058CE4994}" v="1" dt="2026-10-01T12:34:39.887"/>
   </p1510:revLst>
 </p1510:revInfo>
 </file>
@@ -142,173 +142,56 @@
   <pc:docChgLst>
     <pc:chgData name="Andrew Turner" userId="9b60647a-c825-4266-aafa-670849c64782" providerId="ADAL" clId="{292526B5-234E-5EAA-AFB8-0412B8CA4453}"/>
     <pc:docChg chg="custSel addSld modSld modMainMaster">
-      <pc:chgData name="Andrew Turner" userId="9b60647a-c825-4266-aafa-670849c64782" providerId="ADAL" clId="{292526B5-234E-5EAA-AFB8-0412B8CA4453}" dt="2025-10-07T13:28:11.464" v="42"/>
+      <pc:chgData name="Andrew Turner" userId="9b60647a-c825-4266-aafa-670849c64782" providerId="ADAL" clId="{292526B5-234E-5EAA-AFB8-0412B8CA4453}" dt="2026-10-01T12:35:26.364" v="54" actId="1076"/>
       <pc:docMkLst>
         <pc:docMk/>
       </pc:docMkLst>
-      <pc:sldChg chg="setBg">
-        <pc:chgData name="Andrew Turner" userId="9b60647a-c825-4266-aafa-670849c64782" providerId="ADAL" clId="{292526B5-234E-5EAA-AFB8-0412B8CA4453}" dt="2025-10-07T13:26:34.071" v="1"/>
+      <pc:sldChg chg="addSp delSp modSp mod">
+        <pc:chgData name="Andrew Turner" userId="9b60647a-c825-4266-aafa-670849c64782" providerId="ADAL" clId="{292526B5-234E-5EAA-AFB8-0412B8CA4453}" dt="2026-10-01T12:35:07.566" v="53" actId="1076"/>
         <pc:sldMkLst>
           <pc:docMk/>
-          <pc:sldMk cId="2438122950" sldId="256"/>
+          <pc:sldMk cId="2721601462" sldId="265"/>
         </pc:sldMkLst>
+        <pc:spChg chg="mod">
+          <ac:chgData name="Andrew Turner" userId="9b60647a-c825-4266-aafa-670849c64782" providerId="ADAL" clId="{292526B5-234E-5EAA-AFB8-0412B8CA4453}" dt="2026-10-01T12:35:07.566" v="53" actId="1076"/>
+          <ac:spMkLst>
+            <pc:docMk/>
+            <pc:sldMk cId="2721601462" sldId="265"/>
+            <ac:spMk id="3" creationId="{634D4023-7EC2-271D-0A9F-3EC4AF66B16D}"/>
+          </ac:spMkLst>
+        </pc:spChg>
+        <pc:spChg chg="del">
+          <ac:chgData name="Andrew Turner" userId="9b60647a-c825-4266-aafa-670849c64782" providerId="ADAL" clId="{292526B5-234E-5EAA-AFB8-0412B8CA4453}" dt="2026-10-01T12:34:49.534" v="46" actId="478"/>
+          <ac:spMkLst>
+            <pc:docMk/>
+            <pc:sldMk cId="2721601462" sldId="265"/>
+            <ac:spMk id="4" creationId="{4FAA52A4-467D-90A9-93A7-0285F3AECDCC}"/>
+          </ac:spMkLst>
+        </pc:spChg>
+        <pc:picChg chg="add mod">
+          <ac:chgData name="Andrew Turner" userId="9b60647a-c825-4266-aafa-670849c64782" providerId="ADAL" clId="{292526B5-234E-5EAA-AFB8-0412B8CA4453}" dt="2026-10-01T12:34:51.765" v="47" actId="1076"/>
+          <ac:picMkLst>
+            <pc:docMk/>
+            <pc:sldMk cId="2721601462" sldId="265"/>
+            <ac:picMk id="5" creationId="{5E4B1494-0C3B-987B-7FBD-C2EF85507A55}"/>
+          </ac:picMkLst>
+        </pc:picChg>
       </pc:sldChg>
       <pc:sldChg chg="modSp mod">
-        <pc:chgData name="Andrew Turner" userId="9b60647a-c825-4266-aafa-670849c64782" providerId="ADAL" clId="{292526B5-234E-5EAA-AFB8-0412B8CA4453}" dt="2025-10-07T13:27:19.805" v="10" actId="27636"/>
+        <pc:chgData name="Andrew Turner" userId="9b60647a-c825-4266-aafa-670849c64782" providerId="ADAL" clId="{292526B5-234E-5EAA-AFB8-0412B8CA4453}" dt="2026-10-01T12:35:26.364" v="54" actId="1076"/>
         <pc:sldMkLst>
           <pc:docMk/>
-          <pc:sldMk cId="2278441967" sldId="270"/>
+          <pc:sldMk cId="1341082237" sldId="266"/>
         </pc:sldMkLst>
         <pc:spChg chg="mod">
-          <ac:chgData name="Andrew Turner" userId="9b60647a-c825-4266-aafa-670849c64782" providerId="ADAL" clId="{292526B5-234E-5EAA-AFB8-0412B8CA4453}" dt="2025-10-07T13:27:19.805" v="10" actId="27636"/>
+          <ac:chgData name="Andrew Turner" userId="9b60647a-c825-4266-aafa-670849c64782" providerId="ADAL" clId="{292526B5-234E-5EAA-AFB8-0412B8CA4453}" dt="2026-10-01T12:35:26.364" v="54" actId="1076"/>
           <ac:spMkLst>
             <pc:docMk/>
-            <pc:sldMk cId="2278441967" sldId="270"/>
-            <ac:spMk id="3" creationId="{FBE1556F-C944-701C-4C42-C4A15DBCE2E2}"/>
+            <pc:sldMk cId="1341082237" sldId="266"/>
+            <ac:spMk id="3" creationId="{1ECDAE61-A7C1-5B7A-9B9B-16FE377A8414}"/>
           </ac:spMkLst>
         </pc:spChg>
       </pc:sldChg>
-      <pc:sldChg chg="modSp new mod">
-        <pc:chgData name="Andrew Turner" userId="9b60647a-c825-4266-aafa-670849c64782" providerId="ADAL" clId="{292526B5-234E-5EAA-AFB8-0412B8CA4453}" dt="2025-10-07T13:27:58.415" v="30" actId="5793"/>
-        <pc:sldMkLst>
-          <pc:docMk/>
-          <pc:sldMk cId="2226659508" sldId="272"/>
-        </pc:sldMkLst>
-        <pc:spChg chg="mod">
-          <ac:chgData name="Andrew Turner" userId="9b60647a-c825-4266-aafa-670849c64782" providerId="ADAL" clId="{292526B5-234E-5EAA-AFB8-0412B8CA4453}" dt="2025-10-07T13:27:48.152" v="28" actId="20577"/>
-          <ac:spMkLst>
-            <pc:docMk/>
-            <pc:sldMk cId="2226659508" sldId="272"/>
-            <ac:spMk id="2" creationId="{3EB4939D-5810-22CB-7347-EC8497A613D8}"/>
-          </ac:spMkLst>
-        </pc:spChg>
-        <pc:spChg chg="mod">
-          <ac:chgData name="Andrew Turner" userId="9b60647a-c825-4266-aafa-670849c64782" providerId="ADAL" clId="{292526B5-234E-5EAA-AFB8-0412B8CA4453}" dt="2025-10-07T13:27:58.415" v="30" actId="5793"/>
-          <ac:spMkLst>
-            <pc:docMk/>
-            <pc:sldMk cId="2226659508" sldId="272"/>
-            <ac:spMk id="3" creationId="{C1831FC0-B2EB-1377-7168-5604FA9AEFB5}"/>
-          </ac:spMkLst>
-        </pc:spChg>
-      </pc:sldChg>
-      <pc:sldChg chg="modSp new mod">
-        <pc:chgData name="Andrew Turner" userId="9b60647a-c825-4266-aafa-670849c64782" providerId="ADAL" clId="{292526B5-234E-5EAA-AFB8-0412B8CA4453}" dt="2025-10-07T13:28:11.464" v="42"/>
-        <pc:sldMkLst>
-          <pc:docMk/>
-          <pc:sldMk cId="1757325054" sldId="273"/>
-        </pc:sldMkLst>
-        <pc:spChg chg="mod">
-          <ac:chgData name="Andrew Turner" userId="9b60647a-c825-4266-aafa-670849c64782" providerId="ADAL" clId="{292526B5-234E-5EAA-AFB8-0412B8CA4453}" dt="2025-10-07T13:28:05.195" v="41" actId="20577"/>
-          <ac:spMkLst>
-            <pc:docMk/>
-            <pc:sldMk cId="1757325054" sldId="273"/>
-            <ac:spMk id="2" creationId="{6F24343A-6D98-9029-50D4-56B335BC2AEE}"/>
-          </ac:spMkLst>
-        </pc:spChg>
-        <pc:spChg chg="mod">
-          <ac:chgData name="Andrew Turner" userId="9b60647a-c825-4266-aafa-670849c64782" providerId="ADAL" clId="{292526B5-234E-5EAA-AFB8-0412B8CA4453}" dt="2025-10-07T13:28:11.464" v="42"/>
-          <ac:spMkLst>
-            <pc:docMk/>
-            <pc:sldMk cId="1757325054" sldId="273"/>
-            <ac:spMk id="3" creationId="{EDCAA51B-56B8-5ABF-8E6E-040501D9B792}"/>
-          </ac:spMkLst>
-        </pc:spChg>
-      </pc:sldChg>
-      <pc:sldMasterChg chg="setBg modSldLayout">
-        <pc:chgData name="Andrew Turner" userId="9b60647a-c825-4266-aafa-670849c64782" providerId="ADAL" clId="{292526B5-234E-5EAA-AFB8-0412B8CA4453}" dt="2025-10-07T13:26:34.071" v="1"/>
-        <pc:sldMasterMkLst>
-          <pc:docMk/>
-          <pc:sldMasterMk cId="1212155421" sldId="2147483648"/>
-        </pc:sldMasterMkLst>
-        <pc:sldLayoutChg chg="setBg">
-          <pc:chgData name="Andrew Turner" userId="9b60647a-c825-4266-aafa-670849c64782" providerId="ADAL" clId="{292526B5-234E-5EAA-AFB8-0412B8CA4453}" dt="2025-10-07T13:26:34.071" v="1"/>
-          <pc:sldLayoutMkLst>
-            <pc:docMk/>
-            <pc:sldMasterMk cId="1212155421" sldId="2147483648"/>
-            <pc:sldLayoutMk cId="304630515" sldId="2147483649"/>
-          </pc:sldLayoutMkLst>
-        </pc:sldLayoutChg>
-        <pc:sldLayoutChg chg="setBg">
-          <pc:chgData name="Andrew Turner" userId="9b60647a-c825-4266-aafa-670849c64782" providerId="ADAL" clId="{292526B5-234E-5EAA-AFB8-0412B8CA4453}" dt="2025-10-07T13:26:34.071" v="1"/>
-          <pc:sldLayoutMkLst>
-            <pc:docMk/>
-            <pc:sldMasterMk cId="1212155421" sldId="2147483648"/>
-            <pc:sldLayoutMk cId="2907155728" sldId="2147483650"/>
-          </pc:sldLayoutMkLst>
-        </pc:sldLayoutChg>
-        <pc:sldLayoutChg chg="setBg">
-          <pc:chgData name="Andrew Turner" userId="9b60647a-c825-4266-aafa-670849c64782" providerId="ADAL" clId="{292526B5-234E-5EAA-AFB8-0412B8CA4453}" dt="2025-10-07T13:26:34.071" v="1"/>
-          <pc:sldLayoutMkLst>
-            <pc:docMk/>
-            <pc:sldMasterMk cId="1212155421" sldId="2147483648"/>
-            <pc:sldLayoutMk cId="2019322739" sldId="2147483651"/>
-          </pc:sldLayoutMkLst>
-        </pc:sldLayoutChg>
-        <pc:sldLayoutChg chg="setBg">
-          <pc:chgData name="Andrew Turner" userId="9b60647a-c825-4266-aafa-670849c64782" providerId="ADAL" clId="{292526B5-234E-5EAA-AFB8-0412B8CA4453}" dt="2025-10-07T13:26:34.071" v="1"/>
-          <pc:sldLayoutMkLst>
-            <pc:docMk/>
-            <pc:sldMasterMk cId="1212155421" sldId="2147483648"/>
-            <pc:sldLayoutMk cId="3865598591" sldId="2147483652"/>
-          </pc:sldLayoutMkLst>
-        </pc:sldLayoutChg>
-        <pc:sldLayoutChg chg="setBg">
-          <pc:chgData name="Andrew Turner" userId="9b60647a-c825-4266-aafa-670849c64782" providerId="ADAL" clId="{292526B5-234E-5EAA-AFB8-0412B8CA4453}" dt="2025-10-07T13:26:34.071" v="1"/>
-          <pc:sldLayoutMkLst>
-            <pc:docMk/>
-            <pc:sldMasterMk cId="1212155421" sldId="2147483648"/>
-            <pc:sldLayoutMk cId="1095996723" sldId="2147483653"/>
-          </pc:sldLayoutMkLst>
-        </pc:sldLayoutChg>
-        <pc:sldLayoutChg chg="setBg">
-          <pc:chgData name="Andrew Turner" userId="9b60647a-c825-4266-aafa-670849c64782" providerId="ADAL" clId="{292526B5-234E-5EAA-AFB8-0412B8CA4453}" dt="2025-10-07T13:26:34.071" v="1"/>
-          <pc:sldLayoutMkLst>
-            <pc:docMk/>
-            <pc:sldMasterMk cId="1212155421" sldId="2147483648"/>
-            <pc:sldLayoutMk cId="1886600171" sldId="2147483654"/>
-          </pc:sldLayoutMkLst>
-        </pc:sldLayoutChg>
-        <pc:sldLayoutChg chg="setBg">
-          <pc:chgData name="Andrew Turner" userId="9b60647a-c825-4266-aafa-670849c64782" providerId="ADAL" clId="{292526B5-234E-5EAA-AFB8-0412B8CA4453}" dt="2025-10-07T13:26:34.071" v="1"/>
-          <pc:sldLayoutMkLst>
-            <pc:docMk/>
-            <pc:sldMasterMk cId="1212155421" sldId="2147483648"/>
-            <pc:sldLayoutMk cId="4201022816" sldId="2147483655"/>
-          </pc:sldLayoutMkLst>
-        </pc:sldLayoutChg>
-        <pc:sldLayoutChg chg="setBg">
-          <pc:chgData name="Andrew Turner" userId="9b60647a-c825-4266-aafa-670849c64782" providerId="ADAL" clId="{292526B5-234E-5EAA-AFB8-0412B8CA4453}" dt="2025-10-07T13:26:34.071" v="1"/>
-          <pc:sldLayoutMkLst>
-            <pc:docMk/>
-            <pc:sldMasterMk cId="1212155421" sldId="2147483648"/>
-            <pc:sldLayoutMk cId="2964204976" sldId="2147483656"/>
-          </pc:sldLayoutMkLst>
-        </pc:sldLayoutChg>
-        <pc:sldLayoutChg chg="setBg">
-          <pc:chgData name="Andrew Turner" userId="9b60647a-c825-4266-aafa-670849c64782" providerId="ADAL" clId="{292526B5-234E-5EAA-AFB8-0412B8CA4453}" dt="2025-10-07T13:26:34.071" v="1"/>
-          <pc:sldLayoutMkLst>
-            <pc:docMk/>
-            <pc:sldMasterMk cId="1212155421" sldId="2147483648"/>
-            <pc:sldLayoutMk cId="2138059846" sldId="2147483657"/>
-          </pc:sldLayoutMkLst>
-        </pc:sldLayoutChg>
-        <pc:sldLayoutChg chg="setBg">
-          <pc:chgData name="Andrew Turner" userId="9b60647a-c825-4266-aafa-670849c64782" providerId="ADAL" clId="{292526B5-234E-5EAA-AFB8-0412B8CA4453}" dt="2025-10-07T13:26:34.071" v="1"/>
-          <pc:sldLayoutMkLst>
-            <pc:docMk/>
-            <pc:sldMasterMk cId="1212155421" sldId="2147483648"/>
-            <pc:sldLayoutMk cId="2008471422" sldId="2147483658"/>
-          </pc:sldLayoutMkLst>
-        </pc:sldLayoutChg>
-        <pc:sldLayoutChg chg="setBg">
-          <pc:chgData name="Andrew Turner" userId="9b60647a-c825-4266-aafa-670849c64782" providerId="ADAL" clId="{292526B5-234E-5EAA-AFB8-0412B8CA4453}" dt="2025-10-07T13:26:34.071" v="1"/>
-          <pc:sldLayoutMkLst>
-            <pc:docMk/>
-            <pc:sldMasterMk cId="1212155421" sldId="2147483648"/>
-            <pc:sldLayoutMk cId="1479482771" sldId="2147483659"/>
-          </pc:sldLayoutMkLst>
-        </pc:sldLayoutChg>
-      </pc:sldMasterChg>
     </pc:docChg>
   </pc:docChgLst>
 </pc:chgInfo>
@@ -461,7 +344,7 @@
           <a:p>
             <a:fld id="{8F8C057A-9157-564D-A0D7-A1479577237B}" type="datetimeFigureOut">
               <a:rPr lang="en-GB" smtClean="0"/>
-              <a:t>07/10/2025</a:t>
+              <a:t>01/10/2026</a:t>
             </a:fld>
             <a:endParaRPr lang="en-GB"/>
           </a:p>
@@ -659,7 +542,7 @@
           <a:p>
             <a:fld id="{8F8C057A-9157-564D-A0D7-A1479577237B}" type="datetimeFigureOut">
               <a:rPr lang="en-GB" smtClean="0"/>
-              <a:t>07/10/2025</a:t>
+              <a:t>01/10/2026</a:t>
             </a:fld>
             <a:endParaRPr lang="en-GB"/>
           </a:p>
@@ -867,7 +750,7 @@
           <a:p>
             <a:fld id="{8F8C057A-9157-564D-A0D7-A1479577237B}" type="datetimeFigureOut">
               <a:rPr lang="en-GB" smtClean="0"/>
-              <a:t>07/10/2025</a:t>
+              <a:t>01/10/2026</a:t>
             </a:fld>
             <a:endParaRPr lang="en-GB"/>
           </a:p>
@@ -1065,7 +948,7 @@
           <a:p>
             <a:fld id="{8F8C057A-9157-564D-A0D7-A1479577237B}" type="datetimeFigureOut">
               <a:rPr lang="en-GB" smtClean="0"/>
-              <a:t>07/10/2025</a:t>
+              <a:t>01/10/2026</a:t>
             </a:fld>
             <a:endParaRPr lang="en-GB"/>
           </a:p>
@@ -1340,7 +1223,7 @@
           <a:p>
             <a:fld id="{8F8C057A-9157-564D-A0D7-A1479577237B}" type="datetimeFigureOut">
               <a:rPr lang="en-GB" smtClean="0"/>
-              <a:t>07/10/2025</a:t>
+              <a:t>01/10/2026</a:t>
             </a:fld>
             <a:endParaRPr lang="en-GB"/>
           </a:p>
@@ -1605,7 +1488,7 @@
           <a:p>
             <a:fld id="{8F8C057A-9157-564D-A0D7-A1479577237B}" type="datetimeFigureOut">
               <a:rPr lang="en-GB" smtClean="0"/>
-              <a:t>07/10/2025</a:t>
+              <a:t>01/10/2026</a:t>
             </a:fld>
             <a:endParaRPr lang="en-GB"/>
           </a:p>
@@ -2017,7 +1900,7 @@
           <a:p>
             <a:fld id="{8F8C057A-9157-564D-A0D7-A1479577237B}" type="datetimeFigureOut">
               <a:rPr lang="en-GB" smtClean="0"/>
-              <a:t>07/10/2025</a:t>
+              <a:t>01/10/2026</a:t>
             </a:fld>
             <a:endParaRPr lang="en-GB"/>
           </a:p>
@@ -2158,7 +2041,7 @@
           <a:p>
             <a:fld id="{8F8C057A-9157-564D-A0D7-A1479577237B}" type="datetimeFigureOut">
               <a:rPr lang="en-GB" smtClean="0"/>
-              <a:t>07/10/2025</a:t>
+              <a:t>01/10/2026</a:t>
             </a:fld>
             <a:endParaRPr lang="en-GB"/>
           </a:p>
@@ -2271,7 +2154,7 @@
           <a:p>
             <a:fld id="{8F8C057A-9157-564D-A0D7-A1479577237B}" type="datetimeFigureOut">
               <a:rPr lang="en-GB" smtClean="0"/>
-              <a:t>07/10/2025</a:t>
+              <a:t>01/10/2026</a:t>
             </a:fld>
             <a:endParaRPr lang="en-GB"/>
           </a:p>
@@ -2582,7 +2465,7 @@
           <a:p>
             <a:fld id="{8F8C057A-9157-564D-A0D7-A1479577237B}" type="datetimeFigureOut">
               <a:rPr lang="en-GB" smtClean="0"/>
-              <a:t>07/10/2025</a:t>
+              <a:t>01/10/2026</a:t>
             </a:fld>
             <a:endParaRPr lang="en-GB"/>
           </a:p>
@@ -2870,7 +2753,7 @@
           <a:p>
             <a:fld id="{8F8C057A-9157-564D-A0D7-A1479577237B}" type="datetimeFigureOut">
               <a:rPr lang="en-GB" smtClean="0"/>
-              <a:t>07/10/2025</a:t>
+              <a:t>01/10/2026</a:t>
             </a:fld>
             <a:endParaRPr lang="en-GB"/>
           </a:p>
@@ -3114,7 +2997,7 @@
           <a:p>
             <a:fld id="{8F8C057A-9157-564D-A0D7-A1479577237B}" type="datetimeFigureOut">
               <a:rPr lang="en-GB" smtClean="0"/>
-              <a:t>07/10/2025</a:t>
+              <a:t>01/10/2026</a:t>
             </a:fld>
             <a:endParaRPr lang="en-GB"/>
           </a:p>
@@ -3907,10 +3790,15 @@
             <p:ph idx="1"/>
           </p:nvPr>
         </p:nvSpPr>
-        <p:spPr/>
+        <p:spPr>
+          <a:xfrm>
+            <a:off x="444500" y="1556256"/>
+            <a:ext cx="10515600" cy="4905375"/>
+          </a:xfrm>
+        </p:spPr>
         <p:txBody>
           <a:bodyPr>
-            <a:normAutofit fontScale="62500" lnSpcReduction="20000"/>
+            <a:normAutofit fontScale="70000" lnSpcReduction="20000"/>
           </a:bodyPr>
           <a:lstStyle/>
           <a:p>
@@ -3919,7 +3807,14 @@
             </a:pPr>
             <a:r>
               <a:rPr lang="en-GB" dirty="0"/>
-              <a:t>The PUE varies according to how much energy is needed to the cool the HPC system.</a:t>
+              <a:t>The PUE varies according to how much energy is needed to</a:t>
+            </a:r>
+            <a:br>
+              <a:rPr lang="en-GB" dirty="0"/>
+            </a:br>
+            <a:r>
+              <a:rPr lang="en-GB" dirty="0"/>
+              <a:t>the cool the HPC system.</a:t>
             </a:r>
           </a:p>
           <a:p>
@@ -4007,41 +3902,36 @@
           </a:p>
         </p:txBody>
       </p:sp>
-      <p:sp>
-        <p:nvSpPr>
-          <p:cNvPr id="4" name="TextBox 3">
-            <a:extLst>
-              <a:ext uri="{FF2B5EF4-FFF2-40B4-BE49-F238E27FC236}">
-                <a16:creationId xmlns:a16="http://schemas.microsoft.com/office/drawing/2014/main" id="{4FAA52A4-467D-90A9-93A7-0285F3AECDCC}"/>
-              </a:ext>
-            </a:extLst>
-          </p:cNvPr>
-          <p:cNvSpPr txBox="1"/>
+      <p:pic>
+        <p:nvPicPr>
+          <p:cNvPr id="5" name="Picture 4">
+            <a:extLst>
+              <a:ext uri="{FF2B5EF4-FFF2-40B4-BE49-F238E27FC236}">
+                <a16:creationId xmlns:a16="http://schemas.microsoft.com/office/drawing/2014/main" id="{5E4B1494-0C3B-987B-7FBD-C2EF85507A55}"/>
+              </a:ext>
+            </a:extLst>
+          </p:cNvPr>
+          <p:cNvPicPr>
+            <a:picLocks noChangeAspect="1"/>
+          </p:cNvPicPr>
           <p:nvPr/>
-        </p:nvSpPr>
+        </p:nvPicPr>
+        <p:blipFill>
+          <a:blip r:embed="rId2"/>
+          <a:stretch>
+            <a:fillRect/>
+          </a:stretch>
+        </p:blipFill>
         <p:spPr>
           <a:xfrm>
-            <a:off x="9434286" y="1306286"/>
-            <a:ext cx="2284728" cy="369332"/>
+            <a:off x="7097486" y="396369"/>
+            <a:ext cx="4775200" cy="2858511"/>
           </a:xfrm>
           <a:prstGeom prst="rect">
             <a:avLst/>
           </a:prstGeom>
-          <a:noFill/>
         </p:spPr>
-        <p:txBody>
-          <a:bodyPr wrap="none" rtlCol="0">
-            <a:spAutoFit/>
-          </a:bodyPr>
-          <a:lstStyle/>
-          <a:p>
-            <a:r>
-              <a:rPr lang="en-GB" dirty="0"/>
-              <a:t>(TBD) Add ACF image</a:t>
-            </a:r>
-          </a:p>
-        </p:txBody>
-      </p:sp>
+      </p:pic>
     </p:spTree>
     <p:extLst>
       <p:ext uri="{BB962C8B-B14F-4D97-AF65-F5344CB8AC3E}">
@@ -4118,7 +4008,7 @@
         </p:nvSpPr>
         <p:spPr>
           <a:xfrm>
-            <a:off x="838200" y="1713095"/>
+            <a:off x="622300" y="1701891"/>
             <a:ext cx="3396343" cy="4351338"/>
           </a:xfrm>
         </p:spPr>
